--- a/CalendarioAgo26/presentaciones/3_Condicionales.pptx
+++ b/CalendarioAgo26/presentaciones/3_Condicionales.pptx
@@ -149,6 +149,35 @@
 </p:presentation>
 </file>
 
+<file path=ppt/changesInfos/changesInfo1.xml><?xml version="1.0" encoding="utf-8"?>
+<pc:chgInfo xmlns:a="http://schemas.openxmlformats.org/drawingml/2006/main" xmlns:r="http://schemas.openxmlformats.org/officeDocument/2006/relationships" xmlns:ac="http://schemas.microsoft.com/office/drawing/2013/main/command" xmlns:pc="http://schemas.microsoft.com/office/powerpoint/2013/main/command">
+  <pc:docChgLst>
+    <pc:chgData name="Lizethe Pérez Fuertes" userId="4ae9ef87-2a7d-42f8-8dfa-0a501a9e2ff4" providerId="ADAL" clId="{FDDD45CB-1330-4033-A842-3D2746AFF7C7}"/>
+    <pc:docChg chg="modSld">
+      <pc:chgData name="Lizethe Pérez Fuertes" userId="4ae9ef87-2a7d-42f8-8dfa-0a501a9e2ff4" providerId="ADAL" clId="{FDDD45CB-1330-4033-A842-3D2746AFF7C7}" dt="2026-08-11T16:22:28.882" v="5" actId="6549"/>
+      <pc:docMkLst>
+        <pc:docMk/>
+      </pc:docMkLst>
+      <pc:sldChg chg="modSp mod">
+        <pc:chgData name="Lizethe Pérez Fuertes" userId="4ae9ef87-2a7d-42f8-8dfa-0a501a9e2ff4" providerId="ADAL" clId="{FDDD45CB-1330-4033-A842-3D2746AFF7C7}" dt="2026-08-11T16:22:28.882" v="5" actId="6549"/>
+        <pc:sldMkLst>
+          <pc:docMk/>
+          <pc:sldMk cId="2553855534" sldId="257"/>
+        </pc:sldMkLst>
+        <pc:spChg chg="mod">
+          <ac:chgData name="Lizethe Pérez Fuertes" userId="4ae9ef87-2a7d-42f8-8dfa-0a501a9e2ff4" providerId="ADAL" clId="{FDDD45CB-1330-4033-A842-3D2746AFF7C7}" dt="2026-08-11T16:22:28.882" v="5" actId="6549"/>
+          <ac:spMkLst>
+            <pc:docMk/>
+            <pc:sldMk cId="2553855534" sldId="257"/>
+            <ac:spMk id="7" creationId="{585812A4-95EC-4ECB-9775-23912D6B0B70}"/>
+          </ac:spMkLst>
+        </pc:spChg>
+      </pc:sldChg>
+    </pc:docChg>
+  </pc:docChgLst>
+</pc:chgInfo>
+</file>
+
 <file path=ppt/notesMasters/notesMaster1.xml><?xml version="1.0" encoding="utf-8"?>
 <p:notesMaster xmlns:a="http://schemas.openxmlformats.org/drawingml/2006/main" xmlns:r="http://schemas.openxmlformats.org/officeDocument/2006/relationships" xmlns:p="http://schemas.openxmlformats.org/presentationml/2006/main">
   <p:cSld>
@@ -231,7 +260,7 @@
           <a:p>
             <a:fld id="{2D445F07-8756-451B-A938-0248325FC7BB}" type="datetimeFigureOut">
               <a:rPr lang="es-MX" smtClean="0"/>
-              <a:t>07/08/2022</a:t>
+              <a:t>11/08/2026</a:t>
             </a:fld>
             <a:endParaRPr lang="es-MX" dirty="0"/>
           </a:p>
@@ -2108,7 +2137,7 @@
           <a:p>
             <a:fld id="{5E75A0DC-66C6-4CEC-A5EB-F8C97CEC3796}" type="datetimeFigureOut">
               <a:rPr lang="es-MX" smtClean="0"/>
-              <a:t>07/08/2022</a:t>
+              <a:t>11/08/2026</a:t>
             </a:fld>
             <a:endParaRPr lang="es-MX" dirty="0"/>
           </a:p>
@@ -2278,7 +2307,7 @@
           <a:p>
             <a:fld id="{5E75A0DC-66C6-4CEC-A5EB-F8C97CEC3796}" type="datetimeFigureOut">
               <a:rPr lang="es-MX" smtClean="0"/>
-              <a:t>07/08/2022</a:t>
+              <a:t>11/08/2026</a:t>
             </a:fld>
             <a:endParaRPr lang="es-MX" dirty="0"/>
           </a:p>
@@ -2458,7 +2487,7 @@
           <a:p>
             <a:fld id="{5E75A0DC-66C6-4CEC-A5EB-F8C97CEC3796}" type="datetimeFigureOut">
               <a:rPr lang="es-MX" smtClean="0"/>
-              <a:t>07/08/2022</a:t>
+              <a:t>11/08/2026</a:t>
             </a:fld>
             <a:endParaRPr lang="es-MX" dirty="0"/>
           </a:p>
@@ -2611,7 +2640,7 @@
           <a:p>
             <a:fld id="{1D8BD707-D9CF-40AE-B4C6-C98DA3205C09}" type="datetimeFigureOut">
               <a:rPr lang="en-US" smtClean="0"/>
-              <a:t>8/7/2022</a:t>
+              <a:t>8/11/2026</a:t>
             </a:fld>
             <a:endParaRPr lang="en-US"/>
           </a:p>
@@ -2735,7 +2764,7 @@
           <a:p>
             <a:fld id="{1D8BD707-D9CF-40AE-B4C6-C98DA3205C09}" type="datetimeFigureOut">
               <a:rPr lang="en-US" smtClean="0"/>
-              <a:t>8/7/2022</a:t>
+              <a:t>8/11/2026</a:t>
             </a:fld>
             <a:endParaRPr lang="en-US" dirty="0"/>
           </a:p>
@@ -2895,7 +2924,7 @@
           <a:p>
             <a:fld id="{5E75A0DC-66C6-4CEC-A5EB-F8C97CEC3796}" type="datetimeFigureOut">
               <a:rPr lang="es-MX" smtClean="0"/>
-              <a:t>07/08/2022</a:t>
+              <a:t>11/08/2026</a:t>
             </a:fld>
             <a:endParaRPr lang="es-MX" dirty="0"/>
           </a:p>
@@ -3141,7 +3170,7 @@
           <a:p>
             <a:fld id="{5E75A0DC-66C6-4CEC-A5EB-F8C97CEC3796}" type="datetimeFigureOut">
               <a:rPr lang="es-MX" smtClean="0"/>
-              <a:t>07/08/2022</a:t>
+              <a:t>11/08/2026</a:t>
             </a:fld>
             <a:endParaRPr lang="es-MX" dirty="0"/>
           </a:p>
@@ -3429,7 +3458,7 @@
           <a:p>
             <a:fld id="{5E75A0DC-66C6-4CEC-A5EB-F8C97CEC3796}" type="datetimeFigureOut">
               <a:rPr lang="es-MX" smtClean="0"/>
-              <a:t>07/08/2022</a:t>
+              <a:t>11/08/2026</a:t>
             </a:fld>
             <a:endParaRPr lang="es-MX" dirty="0"/>
           </a:p>
@@ -3851,7 +3880,7 @@
           <a:p>
             <a:fld id="{5E75A0DC-66C6-4CEC-A5EB-F8C97CEC3796}" type="datetimeFigureOut">
               <a:rPr lang="es-MX" smtClean="0"/>
-              <a:t>07/08/2022</a:t>
+              <a:t>11/08/2026</a:t>
             </a:fld>
             <a:endParaRPr lang="es-MX" dirty="0"/>
           </a:p>
@@ -3969,7 +3998,7 @@
           <a:p>
             <a:fld id="{5E75A0DC-66C6-4CEC-A5EB-F8C97CEC3796}" type="datetimeFigureOut">
               <a:rPr lang="es-MX" smtClean="0"/>
-              <a:t>07/08/2022</a:t>
+              <a:t>11/08/2026</a:t>
             </a:fld>
             <a:endParaRPr lang="es-MX" dirty="0"/>
           </a:p>
@@ -4064,7 +4093,7 @@
           <a:p>
             <a:fld id="{5E75A0DC-66C6-4CEC-A5EB-F8C97CEC3796}" type="datetimeFigureOut">
               <a:rPr lang="es-MX" smtClean="0"/>
-              <a:t>07/08/2022</a:t>
+              <a:t>11/08/2026</a:t>
             </a:fld>
             <a:endParaRPr lang="es-MX" dirty="0"/>
           </a:p>
@@ -4341,7 +4370,7 @@
           <a:p>
             <a:fld id="{5E75A0DC-66C6-4CEC-A5EB-F8C97CEC3796}" type="datetimeFigureOut">
               <a:rPr lang="es-MX" smtClean="0"/>
-              <a:t>07/08/2022</a:t>
+              <a:t>11/08/2026</a:t>
             </a:fld>
             <a:endParaRPr lang="es-MX" dirty="0"/>
           </a:p>
@@ -4594,7 +4623,7 @@
           <a:p>
             <a:fld id="{5E75A0DC-66C6-4CEC-A5EB-F8C97CEC3796}" type="datetimeFigureOut">
               <a:rPr lang="es-MX" smtClean="0"/>
-              <a:t>07/08/2022</a:t>
+              <a:t>11/08/2026</a:t>
             </a:fld>
             <a:endParaRPr lang="es-MX" dirty="0"/>
           </a:p>
@@ -4807,7 +4836,7 @@
           <a:p>
             <a:fld id="{5E75A0DC-66C6-4CEC-A5EB-F8C97CEC3796}" type="datetimeFigureOut">
               <a:rPr lang="es-MX" smtClean="0"/>
-              <a:t>07/08/2022</a:t>
+              <a:t>11/08/2026</a:t>
             </a:fld>
             <a:endParaRPr lang="es-MX" dirty="0"/>
           </a:p>
@@ -5337,14 +5366,24 @@
               <a:defRPr/>
             </a:pPr>
             <a:r>
-              <a:rPr lang="es-MX" sz="3200" dirty="0">
+              <a:rPr lang="es-MX" sz="3200">
                 <a:solidFill>
                   <a:schemeClr val="bg2">
                     <a:lumMod val="50000"/>
                   </a:schemeClr>
                 </a:solidFill>
               </a:rPr>
-              <a:t>TC 3001 C </a:t>
+              <a:t>TI 3008 </a:t>
+            </a:r>
+            <a:r>
+              <a:rPr lang="es-MX" sz="3200" dirty="0">
+                <a:solidFill>
+                  <a:schemeClr val="bg2">
+                    <a:lumMod val="50000"/>
+                  </a:schemeClr>
+                </a:solidFill>
+              </a:rPr>
+              <a:t>C </a:t>
             </a:r>
             <a:br>
               <a:rPr lang="es-MX" sz="3200" dirty="0">
